--- a/public/kp/Presentation-PVSistema-PDF.pptx
+++ b/public/kp/Presentation-PVSistema-PDF.pptx
@@ -15,6 +15,7 @@
     <p:sldId id="263" r:id="rId14"/>
     <p:sldId id="264" r:id="rId15"/>
     <p:sldId id="265" r:id="rId16"/>
+    <p:sldId id="266" r:id="rId17"/>
   </p:sldIdLst>
   <p:sldSz cx="12191695" cy="6858000" type="screen4x3"/>
   <p:notesSz cx="6858000" cy="9144000"/>
@@ -3512,6 +3513,928 @@
             <a:avLst/>
           </a:prstGeom>
           <a:solidFill>
+            <a:srgbClr val="F7F5EF"/>
+          </a:solidFill>
+          <a:ln>
+            <a:noFill/>
+          </a:ln>
+          <a:effectLst/>
+        </p:spPr>
+        <p:style>
+          <a:lnRef idx="1">
+            <a:schemeClr val="accent1"/>
+          </a:lnRef>
+          <a:fillRef idx="3">
+            <a:schemeClr val="accent1"/>
+          </a:fillRef>
+          <a:effectRef idx="2">
+            <a:schemeClr val="accent1"/>
+          </a:effectRef>
+          <a:fontRef idx="minor">
+            <a:schemeClr val="lt1"/>
+          </a:fontRef>
+        </p:style>
+        <p:txBody>
+          <a:bodyPr rtlCol="0" anchor="ctr"/>
+          <a:lstStyle/>
+          <a:p>
+            <a:pPr algn="ctr"/>
+          </a:p>
+        </p:txBody>
+      </p:sp>
+      <p:sp>
+        <p:nvSpPr>
+          <p:cNvPr id="3" name="TextBox 2"/>
+          <p:cNvSpPr txBox="1"/>
+          <p:nvPr/>
+        </p:nvSpPr>
+        <p:spPr>
+          <a:xfrm>
+            <a:off x="822960" y="640080"/>
+            <a:ext cx="7315200" cy="274320"/>
+          </a:xfrm>
+          <a:prstGeom prst="rect">
+            <a:avLst/>
+          </a:prstGeom>
+          <a:noFill/>
+        </p:spPr>
+        <p:txBody>
+          <a:bodyPr wrap="square" lIns="0" rIns="0" tIns="0" bIns="0">
+            <a:spAutoFit/>
+          </a:bodyPr>
+          <a:lstStyle/>
+          <a:p>
+            <a:pPr algn="l">
+              <a:lnSpc>
+                <a:spcPct val="125000"/>
+              </a:lnSpc>
+            </a:pPr>
+            <a:r>
+              <a:rPr sz="1100" b="0" spc="160">
+                <a:solidFill>
+                  <a:srgbClr val="606662"/>
+                </a:solidFill>
+                <a:latin typeface="Arial"/>
+              </a:rPr>
+              <a:t>КАК НАЧАТЬ</a:t>
+            </a:r>
+          </a:p>
+        </p:txBody>
+      </p:sp>
+      <p:sp>
+        <p:nvSpPr>
+          <p:cNvPr id="4" name="TextBox 3"/>
+          <p:cNvSpPr txBox="1"/>
+          <p:nvPr/>
+        </p:nvSpPr>
+        <p:spPr>
+          <a:xfrm>
+            <a:off x="822960" y="1005840"/>
+            <a:ext cx="10058400" cy="1463040"/>
+          </a:xfrm>
+          <a:prstGeom prst="rect">
+            <a:avLst/>
+          </a:prstGeom>
+          <a:noFill/>
+        </p:spPr>
+        <p:txBody>
+          <a:bodyPr wrap="square" lIns="0" rIns="0" tIns="0" bIns="0">
+            <a:spAutoFit/>
+          </a:bodyPr>
+          <a:lstStyle/>
+          <a:p>
+            <a:pPr algn="l">
+              <a:lnSpc>
+                <a:spcPct val="102000"/>
+              </a:lnSpc>
+            </a:pPr>
+            <a:r>
+              <a:rPr sz="3600" b="1" spc="160">
+                <a:solidFill>
+                  <a:srgbClr val="14181C"/>
+                </a:solidFill>
+                <a:latin typeface="Arial"/>
+              </a:rPr>
+              <a:t>ЧЕТЫРЕ ШАГА ДО</a:t>
+            </a:r>
+          </a:p>
+          <a:p>
+            <a:pPr algn="l">
+              <a:lnSpc>
+                <a:spcPct val="102000"/>
+              </a:lnSpc>
+            </a:pPr>
+            <a:r>
+              <a:rPr sz="3600" b="1" spc="160">
+                <a:solidFill>
+                  <a:srgbClr val="14181C"/>
+                </a:solidFill>
+                <a:latin typeface="Arial"/>
+              </a:rPr>
+              <a:t>РАБОЧИХ МЕСТ</a:t>
+            </a:r>
+          </a:p>
+        </p:txBody>
+      </p:sp>
+      <p:sp>
+        <p:nvSpPr>
+          <p:cNvPr id="5" name="Rectangle 4"/>
+          <p:cNvSpPr/>
+          <p:nvPr/>
+        </p:nvSpPr>
+        <p:spPr>
+          <a:xfrm>
+            <a:off x="822960" y="2606040"/>
+            <a:ext cx="2194560" cy="38100"/>
+          </a:xfrm>
+          <a:prstGeom prst="rect">
+            <a:avLst/>
+          </a:prstGeom>
+          <a:solidFill>
+            <a:srgbClr val="14181C"/>
+          </a:solidFill>
+          <a:ln>
+            <a:noFill/>
+          </a:ln>
+          <a:effectLst/>
+        </p:spPr>
+        <p:style>
+          <a:lnRef idx="1">
+            <a:schemeClr val="accent1"/>
+          </a:lnRef>
+          <a:fillRef idx="3">
+            <a:schemeClr val="accent1"/>
+          </a:fillRef>
+          <a:effectRef idx="2">
+            <a:schemeClr val="accent1"/>
+          </a:effectRef>
+          <a:fontRef idx="minor">
+            <a:schemeClr val="lt1"/>
+          </a:fontRef>
+        </p:style>
+        <p:txBody>
+          <a:bodyPr rtlCol="0" anchor="ctr"/>
+          <a:lstStyle/>
+          <a:p>
+            <a:pPr algn="ctr"/>
+          </a:p>
+        </p:txBody>
+      </p:sp>
+      <p:sp>
+        <p:nvSpPr>
+          <p:cNvPr id="6" name="TextBox 5"/>
+          <p:cNvSpPr txBox="1"/>
+          <p:nvPr/>
+        </p:nvSpPr>
+        <p:spPr>
+          <a:xfrm>
+            <a:off x="822960" y="3154680"/>
+            <a:ext cx="2606040" cy="731520"/>
+          </a:xfrm>
+          <a:prstGeom prst="rect">
+            <a:avLst/>
+          </a:prstGeom>
+          <a:noFill/>
+        </p:spPr>
+        <p:txBody>
+          <a:bodyPr wrap="square" lIns="0" rIns="0" tIns="0" bIns="0">
+            <a:spAutoFit/>
+          </a:bodyPr>
+          <a:lstStyle/>
+          <a:p>
+            <a:pPr algn="l">
+              <a:lnSpc>
+                <a:spcPct val="125000"/>
+              </a:lnSpc>
+            </a:pPr>
+            <a:r>
+              <a:rPr sz="3400" b="1">
+                <a:solidFill>
+                  <a:srgbClr val="C9C5BC"/>
+                </a:solidFill>
+                <a:latin typeface="Arial"/>
+              </a:rPr>
+              <a:t>01</a:t>
+            </a:r>
+          </a:p>
+        </p:txBody>
+      </p:sp>
+      <p:sp>
+        <p:nvSpPr>
+          <p:cNvPr id="7" name="Rectangle 6"/>
+          <p:cNvSpPr/>
+          <p:nvPr/>
+        </p:nvSpPr>
+        <p:spPr>
+          <a:xfrm>
+            <a:off x="822960" y="3867912"/>
+            <a:ext cx="2423160" cy="25400"/>
+          </a:xfrm>
+          <a:prstGeom prst="rect">
+            <a:avLst/>
+          </a:prstGeom>
+          <a:solidFill>
+            <a:srgbClr val="14181C"/>
+          </a:solidFill>
+          <a:ln>
+            <a:noFill/>
+          </a:ln>
+          <a:effectLst/>
+        </p:spPr>
+        <p:style>
+          <a:lnRef idx="1">
+            <a:schemeClr val="accent1"/>
+          </a:lnRef>
+          <a:fillRef idx="3">
+            <a:schemeClr val="accent1"/>
+          </a:fillRef>
+          <a:effectRef idx="2">
+            <a:schemeClr val="accent1"/>
+          </a:effectRef>
+          <a:fontRef idx="minor">
+            <a:schemeClr val="lt1"/>
+          </a:fontRef>
+        </p:style>
+        <p:txBody>
+          <a:bodyPr rtlCol="0" anchor="ctr"/>
+          <a:lstStyle/>
+          <a:p>
+            <a:pPr algn="ctr"/>
+          </a:p>
+        </p:txBody>
+      </p:sp>
+      <p:sp>
+        <p:nvSpPr>
+          <p:cNvPr id="8" name="TextBox 7"/>
+          <p:cNvSpPr txBox="1"/>
+          <p:nvPr/>
+        </p:nvSpPr>
+        <p:spPr>
+          <a:xfrm>
+            <a:off x="822960" y="4069080"/>
+            <a:ext cx="2423160" cy="457200"/>
+          </a:xfrm>
+          <a:prstGeom prst="rect">
+            <a:avLst/>
+          </a:prstGeom>
+          <a:noFill/>
+        </p:spPr>
+        <p:txBody>
+          <a:bodyPr wrap="square" lIns="0" rIns="0" tIns="0" bIns="0">
+            <a:spAutoFit/>
+          </a:bodyPr>
+          <a:lstStyle/>
+          <a:p>
+            <a:pPr algn="l">
+              <a:lnSpc>
+                <a:spcPct val="125000"/>
+              </a:lnSpc>
+            </a:pPr>
+            <a:r>
+              <a:rPr sz="1700" b="1" spc="160">
+                <a:solidFill>
+                  <a:srgbClr val="14181C"/>
+                </a:solidFill>
+                <a:latin typeface="Arial"/>
+              </a:rPr>
+              <a:t>ЗАЯВКА</a:t>
+            </a:r>
+          </a:p>
+        </p:txBody>
+      </p:sp>
+      <p:sp>
+        <p:nvSpPr>
+          <p:cNvPr id="9" name="TextBox 8"/>
+          <p:cNvSpPr txBox="1"/>
+          <p:nvPr/>
+        </p:nvSpPr>
+        <p:spPr>
+          <a:xfrm>
+            <a:off x="822960" y="4526280"/>
+            <a:ext cx="2377440" cy="1005840"/>
+          </a:xfrm>
+          <a:prstGeom prst="rect">
+            <a:avLst/>
+          </a:prstGeom>
+          <a:noFill/>
+        </p:spPr>
+        <p:txBody>
+          <a:bodyPr wrap="square" lIns="0" rIns="0" tIns="0" bIns="0">
+            <a:spAutoFit/>
+          </a:bodyPr>
+          <a:lstStyle/>
+          <a:p>
+            <a:pPr algn="l">
+              <a:lnSpc>
+                <a:spcPct val="130000"/>
+              </a:lnSpc>
+            </a:pPr>
+            <a:r>
+              <a:rPr sz="1250" b="0">
+                <a:solidFill>
+                  <a:srgbClr val="606662"/>
+                </a:solidFill>
+                <a:latin typeface="Arial"/>
+              </a:rPr>
+              <a:t>Обсуждаем количество мест и получаете демоверсию</a:t>
+            </a:r>
+          </a:p>
+        </p:txBody>
+      </p:sp>
+      <p:sp>
+        <p:nvSpPr>
+          <p:cNvPr id="10" name="TextBox 9"/>
+          <p:cNvSpPr txBox="1"/>
+          <p:nvPr/>
+        </p:nvSpPr>
+        <p:spPr>
+          <a:xfrm>
+            <a:off x="3630168" y="3154680"/>
+            <a:ext cx="2606040" cy="731520"/>
+          </a:xfrm>
+          <a:prstGeom prst="rect">
+            <a:avLst/>
+          </a:prstGeom>
+          <a:noFill/>
+        </p:spPr>
+        <p:txBody>
+          <a:bodyPr wrap="square" lIns="0" rIns="0" tIns="0" bIns="0">
+            <a:spAutoFit/>
+          </a:bodyPr>
+          <a:lstStyle/>
+          <a:p>
+            <a:pPr algn="l">
+              <a:lnSpc>
+                <a:spcPct val="125000"/>
+              </a:lnSpc>
+            </a:pPr>
+            <a:r>
+              <a:rPr sz="3400" b="1">
+                <a:solidFill>
+                  <a:srgbClr val="C9C5BC"/>
+                </a:solidFill>
+                <a:latin typeface="Arial"/>
+              </a:rPr>
+              <a:t>02</a:t>
+            </a:r>
+          </a:p>
+        </p:txBody>
+      </p:sp>
+      <p:sp>
+        <p:nvSpPr>
+          <p:cNvPr id="11" name="Rectangle 10"/>
+          <p:cNvSpPr/>
+          <p:nvPr/>
+        </p:nvSpPr>
+        <p:spPr>
+          <a:xfrm>
+            <a:off x="3630168" y="3867912"/>
+            <a:ext cx="2423160" cy="25400"/>
+          </a:xfrm>
+          <a:prstGeom prst="rect">
+            <a:avLst/>
+          </a:prstGeom>
+          <a:solidFill>
+            <a:srgbClr val="14181C"/>
+          </a:solidFill>
+          <a:ln>
+            <a:noFill/>
+          </a:ln>
+          <a:effectLst/>
+        </p:spPr>
+        <p:style>
+          <a:lnRef idx="1">
+            <a:schemeClr val="accent1"/>
+          </a:lnRef>
+          <a:fillRef idx="3">
+            <a:schemeClr val="accent1"/>
+          </a:fillRef>
+          <a:effectRef idx="2">
+            <a:schemeClr val="accent1"/>
+          </a:effectRef>
+          <a:fontRef idx="minor">
+            <a:schemeClr val="lt1"/>
+          </a:fontRef>
+        </p:style>
+        <p:txBody>
+          <a:bodyPr rtlCol="0" anchor="ctr"/>
+          <a:lstStyle/>
+          <a:p>
+            <a:pPr algn="ctr"/>
+          </a:p>
+        </p:txBody>
+      </p:sp>
+      <p:sp>
+        <p:nvSpPr>
+          <p:cNvPr id="12" name="TextBox 11"/>
+          <p:cNvSpPr txBox="1"/>
+          <p:nvPr/>
+        </p:nvSpPr>
+        <p:spPr>
+          <a:xfrm>
+            <a:off x="3630168" y="4069080"/>
+            <a:ext cx="2423160" cy="457200"/>
+          </a:xfrm>
+          <a:prstGeom prst="rect">
+            <a:avLst/>
+          </a:prstGeom>
+          <a:noFill/>
+        </p:spPr>
+        <p:txBody>
+          <a:bodyPr wrap="square" lIns="0" rIns="0" tIns="0" bIns="0">
+            <a:spAutoFit/>
+          </a:bodyPr>
+          <a:lstStyle/>
+          <a:p>
+            <a:pPr algn="l">
+              <a:lnSpc>
+                <a:spcPct val="125000"/>
+              </a:lnSpc>
+            </a:pPr>
+            <a:r>
+              <a:rPr sz="1700" b="1" spc="160">
+                <a:solidFill>
+                  <a:srgbClr val="14181C"/>
+                </a:solidFill>
+                <a:latin typeface="Arial"/>
+              </a:rPr>
+              <a:t>ДОГОВОР</a:t>
+            </a:r>
+          </a:p>
+        </p:txBody>
+      </p:sp>
+      <p:sp>
+        <p:nvSpPr>
+          <p:cNvPr id="13" name="TextBox 12"/>
+          <p:cNvSpPr txBox="1"/>
+          <p:nvPr/>
+        </p:nvSpPr>
+        <p:spPr>
+          <a:xfrm>
+            <a:off x="3630168" y="4526280"/>
+            <a:ext cx="2377440" cy="1005840"/>
+          </a:xfrm>
+          <a:prstGeom prst="rect">
+            <a:avLst/>
+          </a:prstGeom>
+          <a:noFill/>
+        </p:spPr>
+        <p:txBody>
+          <a:bodyPr wrap="square" lIns="0" rIns="0" tIns="0" bIns="0">
+            <a:spAutoFit/>
+          </a:bodyPr>
+          <a:lstStyle/>
+          <a:p>
+            <a:pPr algn="l">
+              <a:lnSpc>
+                <a:spcPct val="130000"/>
+              </a:lnSpc>
+            </a:pPr>
+            <a:r>
+              <a:rPr sz="1250" b="0">
+                <a:solidFill>
+                  <a:srgbClr val="606662"/>
+                </a:solidFill>
+                <a:latin typeface="Arial"/>
+              </a:rPr>
+              <a:t>Подписываем и выставляем счёт</a:t>
+            </a:r>
+          </a:p>
+        </p:txBody>
+      </p:sp>
+      <p:sp>
+        <p:nvSpPr>
+          <p:cNvPr id="14" name="TextBox 13"/>
+          <p:cNvSpPr txBox="1"/>
+          <p:nvPr/>
+        </p:nvSpPr>
+        <p:spPr>
+          <a:xfrm>
+            <a:off x="6437376" y="3154680"/>
+            <a:ext cx="2606040" cy="731520"/>
+          </a:xfrm>
+          <a:prstGeom prst="rect">
+            <a:avLst/>
+          </a:prstGeom>
+          <a:noFill/>
+        </p:spPr>
+        <p:txBody>
+          <a:bodyPr wrap="square" lIns="0" rIns="0" tIns="0" bIns="0">
+            <a:spAutoFit/>
+          </a:bodyPr>
+          <a:lstStyle/>
+          <a:p>
+            <a:pPr algn="l">
+              <a:lnSpc>
+                <a:spcPct val="125000"/>
+              </a:lnSpc>
+            </a:pPr>
+            <a:r>
+              <a:rPr sz="3400" b="1">
+                <a:solidFill>
+                  <a:srgbClr val="C9C5BC"/>
+                </a:solidFill>
+                <a:latin typeface="Arial"/>
+              </a:rPr>
+              <a:t>03</a:t>
+            </a:r>
+          </a:p>
+        </p:txBody>
+      </p:sp>
+      <p:sp>
+        <p:nvSpPr>
+          <p:cNvPr id="15" name="Rectangle 14"/>
+          <p:cNvSpPr/>
+          <p:nvPr/>
+        </p:nvSpPr>
+        <p:spPr>
+          <a:xfrm>
+            <a:off x="6437376" y="3867912"/>
+            <a:ext cx="2423160" cy="25400"/>
+          </a:xfrm>
+          <a:prstGeom prst="rect">
+            <a:avLst/>
+          </a:prstGeom>
+          <a:solidFill>
+            <a:srgbClr val="14181C"/>
+          </a:solidFill>
+          <a:ln>
+            <a:noFill/>
+          </a:ln>
+          <a:effectLst/>
+        </p:spPr>
+        <p:style>
+          <a:lnRef idx="1">
+            <a:schemeClr val="accent1"/>
+          </a:lnRef>
+          <a:fillRef idx="3">
+            <a:schemeClr val="accent1"/>
+          </a:fillRef>
+          <a:effectRef idx="2">
+            <a:schemeClr val="accent1"/>
+          </a:effectRef>
+          <a:fontRef idx="minor">
+            <a:schemeClr val="lt1"/>
+          </a:fontRef>
+        </p:style>
+        <p:txBody>
+          <a:bodyPr rtlCol="0" anchor="ctr"/>
+          <a:lstStyle/>
+          <a:p>
+            <a:pPr algn="ctr"/>
+          </a:p>
+        </p:txBody>
+      </p:sp>
+      <p:sp>
+        <p:nvSpPr>
+          <p:cNvPr id="16" name="TextBox 15"/>
+          <p:cNvSpPr txBox="1"/>
+          <p:nvPr/>
+        </p:nvSpPr>
+        <p:spPr>
+          <a:xfrm>
+            <a:off x="6437376" y="4069080"/>
+            <a:ext cx="2423160" cy="457200"/>
+          </a:xfrm>
+          <a:prstGeom prst="rect">
+            <a:avLst/>
+          </a:prstGeom>
+          <a:noFill/>
+        </p:spPr>
+        <p:txBody>
+          <a:bodyPr wrap="square" lIns="0" rIns="0" tIns="0" bIns="0">
+            <a:spAutoFit/>
+          </a:bodyPr>
+          <a:lstStyle/>
+          <a:p>
+            <a:pPr algn="l">
+              <a:lnSpc>
+                <a:spcPct val="125000"/>
+              </a:lnSpc>
+            </a:pPr>
+            <a:r>
+              <a:rPr sz="1700" b="1" spc="160">
+                <a:solidFill>
+                  <a:srgbClr val="14181C"/>
+                </a:solidFill>
+                <a:latin typeface="Arial"/>
+              </a:rPr>
+              <a:t>ПЕРЕДАЧА</a:t>
+            </a:r>
+          </a:p>
+        </p:txBody>
+      </p:sp>
+      <p:sp>
+        <p:nvSpPr>
+          <p:cNvPr id="17" name="TextBox 16"/>
+          <p:cNvSpPr txBox="1"/>
+          <p:nvPr/>
+        </p:nvSpPr>
+        <p:spPr>
+          <a:xfrm>
+            <a:off x="6437376" y="4526280"/>
+            <a:ext cx="2377440" cy="1005840"/>
+          </a:xfrm>
+          <a:prstGeom prst="rect">
+            <a:avLst/>
+          </a:prstGeom>
+          <a:noFill/>
+        </p:spPr>
+        <p:txBody>
+          <a:bodyPr wrap="square" lIns="0" rIns="0" tIns="0" bIns="0">
+            <a:spAutoFit/>
+          </a:bodyPr>
+          <a:lstStyle/>
+          <a:p>
+            <a:pPr algn="l">
+              <a:lnSpc>
+                <a:spcPct val="130000"/>
+              </a:lnSpc>
+            </a:pPr>
+            <a:r>
+              <a:rPr sz="1250" b="0">
+                <a:solidFill>
+                  <a:srgbClr val="606662"/>
+                </a:solidFill>
+                <a:latin typeface="Arial"/>
+              </a:rPr>
+              <a:t>Ключ активации — 3 рабочих дня после оплаты</a:t>
+            </a:r>
+          </a:p>
+        </p:txBody>
+      </p:sp>
+      <p:sp>
+        <p:nvSpPr>
+          <p:cNvPr id="18" name="TextBox 17"/>
+          <p:cNvSpPr txBox="1"/>
+          <p:nvPr/>
+        </p:nvSpPr>
+        <p:spPr>
+          <a:xfrm>
+            <a:off x="9244584" y="3154680"/>
+            <a:ext cx="2606040" cy="731520"/>
+          </a:xfrm>
+          <a:prstGeom prst="rect">
+            <a:avLst/>
+          </a:prstGeom>
+          <a:noFill/>
+        </p:spPr>
+        <p:txBody>
+          <a:bodyPr wrap="square" lIns="0" rIns="0" tIns="0" bIns="0">
+            <a:spAutoFit/>
+          </a:bodyPr>
+          <a:lstStyle/>
+          <a:p>
+            <a:pPr algn="l">
+              <a:lnSpc>
+                <a:spcPct val="125000"/>
+              </a:lnSpc>
+            </a:pPr>
+            <a:r>
+              <a:rPr sz="3400" b="1">
+                <a:solidFill>
+                  <a:srgbClr val="C9C5BC"/>
+                </a:solidFill>
+                <a:latin typeface="Arial"/>
+              </a:rPr>
+              <a:t>04</a:t>
+            </a:r>
+          </a:p>
+        </p:txBody>
+      </p:sp>
+      <p:sp>
+        <p:nvSpPr>
+          <p:cNvPr id="19" name="Rectangle 18"/>
+          <p:cNvSpPr/>
+          <p:nvPr/>
+        </p:nvSpPr>
+        <p:spPr>
+          <a:xfrm>
+            <a:off x="9244584" y="3867912"/>
+            <a:ext cx="2423160" cy="25400"/>
+          </a:xfrm>
+          <a:prstGeom prst="rect">
+            <a:avLst/>
+          </a:prstGeom>
+          <a:solidFill>
+            <a:srgbClr val="14181C"/>
+          </a:solidFill>
+          <a:ln>
+            <a:noFill/>
+          </a:ln>
+          <a:effectLst/>
+        </p:spPr>
+        <p:style>
+          <a:lnRef idx="1">
+            <a:schemeClr val="accent1"/>
+          </a:lnRef>
+          <a:fillRef idx="3">
+            <a:schemeClr val="accent1"/>
+          </a:fillRef>
+          <a:effectRef idx="2">
+            <a:schemeClr val="accent1"/>
+          </a:effectRef>
+          <a:fontRef idx="minor">
+            <a:schemeClr val="lt1"/>
+          </a:fontRef>
+        </p:style>
+        <p:txBody>
+          <a:bodyPr rtlCol="0" anchor="ctr"/>
+          <a:lstStyle/>
+          <a:p>
+            <a:pPr algn="ctr"/>
+          </a:p>
+        </p:txBody>
+      </p:sp>
+      <p:sp>
+        <p:nvSpPr>
+          <p:cNvPr id="20" name="TextBox 19"/>
+          <p:cNvSpPr txBox="1"/>
+          <p:nvPr/>
+        </p:nvSpPr>
+        <p:spPr>
+          <a:xfrm>
+            <a:off x="9244584" y="4069080"/>
+            <a:ext cx="2423160" cy="457200"/>
+          </a:xfrm>
+          <a:prstGeom prst="rect">
+            <a:avLst/>
+          </a:prstGeom>
+          <a:noFill/>
+        </p:spPr>
+        <p:txBody>
+          <a:bodyPr wrap="square" lIns="0" rIns="0" tIns="0" bIns="0">
+            <a:spAutoFit/>
+          </a:bodyPr>
+          <a:lstStyle/>
+          <a:p>
+            <a:pPr algn="l">
+              <a:lnSpc>
+                <a:spcPct val="125000"/>
+              </a:lnSpc>
+            </a:pPr>
+            <a:r>
+              <a:rPr sz="1700" b="1" spc="160">
+                <a:solidFill>
+                  <a:srgbClr val="14181C"/>
+                </a:solidFill>
+                <a:latin typeface="Arial"/>
+              </a:rPr>
+              <a:t>ЗАПУСК</a:t>
+            </a:r>
+          </a:p>
+        </p:txBody>
+      </p:sp>
+      <p:sp>
+        <p:nvSpPr>
+          <p:cNvPr id="21" name="TextBox 20"/>
+          <p:cNvSpPr txBox="1"/>
+          <p:nvPr/>
+        </p:nvSpPr>
+        <p:spPr>
+          <a:xfrm>
+            <a:off x="9244584" y="4526280"/>
+            <a:ext cx="2377440" cy="1005840"/>
+          </a:xfrm>
+          <a:prstGeom prst="rect">
+            <a:avLst/>
+          </a:prstGeom>
+          <a:noFill/>
+        </p:spPr>
+        <p:txBody>
+          <a:bodyPr wrap="square" lIns="0" rIns="0" tIns="0" bIns="0">
+            <a:spAutoFit/>
+          </a:bodyPr>
+          <a:lstStyle/>
+          <a:p>
+            <a:pPr algn="l">
+              <a:lnSpc>
+                <a:spcPct val="130000"/>
+              </a:lnSpc>
+            </a:pPr>
+            <a:r>
+              <a:rPr sz="1250" b="0">
+                <a:solidFill>
+                  <a:srgbClr val="606662"/>
+                </a:solidFill>
+                <a:latin typeface="Arial"/>
+              </a:rPr>
+              <a:t>Установка, настройка и обучение сотрудников</a:t>
+            </a:r>
+          </a:p>
+        </p:txBody>
+      </p:sp>
+      <p:sp>
+        <p:nvSpPr>
+          <p:cNvPr id="22" name="TextBox 21"/>
+          <p:cNvSpPr txBox="1"/>
+          <p:nvPr/>
+        </p:nvSpPr>
+        <p:spPr>
+          <a:xfrm>
+            <a:off x="640080" y="6291072"/>
+            <a:ext cx="7315200" cy="274320"/>
+          </a:xfrm>
+          <a:prstGeom prst="rect">
+            <a:avLst/>
+          </a:prstGeom>
+          <a:noFill/>
+        </p:spPr>
+        <p:txBody>
+          <a:bodyPr wrap="square" lIns="0" rIns="0" tIns="0" bIns="0">
+            <a:spAutoFit/>
+          </a:bodyPr>
+          <a:lstStyle/>
+          <a:p>
+            <a:pPr algn="l">
+              <a:lnSpc>
+                <a:spcPct val="125000"/>
+              </a:lnSpc>
+            </a:pPr>
+            <a:r>
+              <a:rPr sz="1000" b="0" spc="160">
+                <a:solidFill>
+                  <a:srgbClr val="606662"/>
+                </a:solidFill>
+                <a:latin typeface="Arial"/>
+              </a:rPr>
+              <a:t>ПВ-СИСТЕМА PDF</a:t>
+            </a:r>
+          </a:p>
+        </p:txBody>
+      </p:sp>
+      <p:sp>
+        <p:nvSpPr>
+          <p:cNvPr id="23" name="TextBox 22"/>
+          <p:cNvSpPr txBox="1"/>
+          <p:nvPr/>
+        </p:nvSpPr>
+        <p:spPr>
+          <a:xfrm>
+            <a:off x="10911535" y="6291072"/>
+            <a:ext cx="640080" cy="274320"/>
+          </a:xfrm>
+          <a:prstGeom prst="rect">
+            <a:avLst/>
+          </a:prstGeom>
+          <a:noFill/>
+        </p:spPr>
+        <p:txBody>
+          <a:bodyPr wrap="square" lIns="0" rIns="0" tIns="0" bIns="0">
+            <a:spAutoFit/>
+          </a:bodyPr>
+          <a:lstStyle/>
+          <a:p>
+            <a:pPr algn="r">
+              <a:lnSpc>
+                <a:spcPct val="125000"/>
+              </a:lnSpc>
+            </a:pPr>
+            <a:r>
+              <a:rPr sz="1000" b="0">
+                <a:solidFill>
+                  <a:srgbClr val="606662"/>
+                </a:solidFill>
+                <a:latin typeface="Arial"/>
+              </a:rPr>
+              <a:t>10</a:t>
+            </a:r>
+          </a:p>
+        </p:txBody>
+      </p:sp>
+    </p:spTree>
+  </p:cSld>
+  <p:clrMapOvr>
+    <a:masterClrMapping/>
+  </p:clrMapOvr>
+</p:sld>
+</file>
+
+<file path=ppt/slides/slide11.xml><?xml version="1.0" encoding="utf-8"?>
+<p:sld xmlns:a="http://schemas.openxmlformats.org/drawingml/2006/main" xmlns:p="http://schemas.openxmlformats.org/presentationml/2006/main" xmlns:r="http://schemas.openxmlformats.org/officeDocument/2006/relationships">
+  <p:cSld>
+    <p:spTree>
+      <p:nvGrpSpPr>
+        <p:cNvPr id="1" name=""/>
+        <p:cNvGrpSpPr/>
+        <p:nvPr/>
+      </p:nvGrpSpPr>
+      <p:grpSpPr/>
+      <p:sp>
+        <p:nvSpPr>
+          <p:cNvPr id="2" name="Rectangle 1"/>
+          <p:cNvSpPr/>
+          <p:nvPr/>
+        </p:nvSpPr>
+        <p:spPr>
+          <a:xfrm>
+            <a:off x="0" y="0"/>
+            <a:ext cx="12191695" cy="6858000"/>
+          </a:xfrm>
+          <a:prstGeom prst="rect">
+            <a:avLst/>
+          </a:prstGeom>
+          <a:solidFill>
             <a:srgbClr val="14181C"/>
           </a:solidFill>
           <a:ln>
@@ -11758,7 +12681,7 @@
                 </a:solidFill>
                 <a:latin typeface="Arial"/>
               </a:rPr>
-              <a:t>КАК НАЧАТЬ</a:t>
+              <a:t>СРАВНЕНИЕ</a:t>
             </a:r>
           </a:p>
         </p:txBody>
@@ -11772,7 +12695,7 @@
         <p:spPr>
           <a:xfrm>
             <a:off x="822960" y="1005840"/>
-            <a:ext cx="10058400" cy="1463040"/>
+            <a:ext cx="5943600" cy="1463040"/>
           </a:xfrm>
           <a:prstGeom prst="rect">
             <a:avLst/>
@@ -11791,13 +12714,13 @@
               </a:lnSpc>
             </a:pPr>
             <a:r>
-              <a:rPr sz="3600" b="1" spc="160">
+              <a:rPr sz="3400" b="1" spc="160">
                 <a:solidFill>
                   <a:srgbClr val="14181C"/>
                 </a:solidFill>
                 <a:latin typeface="Arial"/>
               </a:rPr>
-              <a:t>ЧЕТЫРЕ ШАГА ДО</a:t>
+              <a:t>ЦЕНА ЗА ОДНО</a:t>
             </a:r>
           </a:p>
           <a:p>
@@ -11807,13 +12730,13 @@
               </a:lnSpc>
             </a:pPr>
             <a:r>
-              <a:rPr sz="3600" b="1" spc="160">
+              <a:rPr sz="3400" b="1" spc="160">
                 <a:solidFill>
                   <a:srgbClr val="14181C"/>
                 </a:solidFill>
                 <a:latin typeface="Arial"/>
               </a:rPr>
-              <a:t>РАБОЧИХ МЕСТ</a:t>
+              <a:t>РАБОЧЕЕ МЕСТО В ГОД</a:t>
             </a:r>
           </a:p>
         </p:txBody>
@@ -11826,7 +12749,7 @@
         </p:nvSpPr>
         <p:spPr>
           <a:xfrm>
-            <a:off x="822960" y="2606040"/>
+            <a:off x="822960" y="2514600"/>
             <a:ext cx="2194560" cy="38100"/>
           </a:xfrm>
           <a:prstGeom prst="rect">
@@ -11864,53 +12787,658 @@
       </p:sp>
       <p:sp>
         <p:nvSpPr>
-          <p:cNvPr id="6" name="TextBox 5"/>
-          <p:cNvSpPr txBox="1"/>
-          <p:nvPr/>
-        </p:nvSpPr>
-        <p:spPr>
-          <a:xfrm>
-            <a:off x="822960" y="3154680"/>
-            <a:ext cx="2606040" cy="731520"/>
-          </a:xfrm>
-          <a:prstGeom prst="rect">
-            <a:avLst/>
-          </a:prstGeom>
-          <a:noFill/>
-        </p:spPr>
-        <p:txBody>
-          <a:bodyPr wrap="square" lIns="0" rIns="0" tIns="0" bIns="0">
-            <a:spAutoFit/>
-          </a:bodyPr>
-          <a:lstStyle/>
-          <a:p>
-            <a:pPr algn="l">
+          <p:cNvPr id="6" name="Rectangle 5"/>
+          <p:cNvSpPr/>
+          <p:nvPr/>
+        </p:nvSpPr>
+        <p:spPr>
+          <a:xfrm>
+            <a:off x="822960" y="3291840"/>
+            <a:ext cx="2103120" cy="1965960"/>
+          </a:xfrm>
+          <a:prstGeom prst="rect">
+            <a:avLst/>
+          </a:prstGeom>
+          <a:solidFill>
+            <a:srgbClr val="D3CFC6"/>
+          </a:solidFill>
+          <a:ln>
+            <a:noFill/>
+          </a:ln>
+          <a:effectLst/>
+        </p:spPr>
+        <p:style>
+          <a:lnRef idx="1">
+            <a:schemeClr val="accent1"/>
+          </a:lnRef>
+          <a:fillRef idx="3">
+            <a:schemeClr val="accent1"/>
+          </a:fillRef>
+          <a:effectRef idx="2">
+            <a:schemeClr val="accent1"/>
+          </a:effectRef>
+          <a:fontRef idx="minor">
+            <a:schemeClr val="lt1"/>
+          </a:fontRef>
+        </p:style>
+        <p:txBody>
+          <a:bodyPr rtlCol="0" anchor="ctr"/>
+          <a:lstStyle/>
+          <a:p>
+            <a:pPr algn="ctr"/>
+          </a:p>
+        </p:txBody>
+      </p:sp>
+      <p:sp>
+        <p:nvSpPr>
+          <p:cNvPr id="7" name="TextBox 6"/>
+          <p:cNvSpPr txBox="1"/>
+          <p:nvPr/>
+        </p:nvSpPr>
+        <p:spPr>
+          <a:xfrm>
+            <a:off x="822960" y="2816352"/>
+            <a:ext cx="2103120" cy="411480"/>
+          </a:xfrm>
+          <a:prstGeom prst="rect">
+            <a:avLst/>
+          </a:prstGeom>
+          <a:noFill/>
+        </p:spPr>
+        <p:txBody>
+          <a:bodyPr wrap="square" lIns="0" rIns="0" tIns="0" bIns="0">
+            <a:spAutoFit/>
+          </a:bodyPr>
+          <a:lstStyle/>
+          <a:p>
+            <a:pPr algn="ctr">
               <a:lnSpc>
                 <a:spcPct val="125000"/>
               </a:lnSpc>
             </a:pPr>
             <a:r>
-              <a:rPr sz="3400" b="1">
-                <a:solidFill>
-                  <a:srgbClr val="C9C5BC"/>
-                </a:solidFill>
-                <a:latin typeface="Arial"/>
-              </a:rPr>
-              <a:t>01</a:t>
-            </a:r>
-          </a:p>
-        </p:txBody>
-      </p:sp>
-      <p:sp>
-        <p:nvSpPr>
-          <p:cNvPr id="7" name="Rectangle 6"/>
+              <a:rPr sz="1900" b="1">
+                <a:solidFill>
+                  <a:srgbClr val="606662"/>
+                </a:solidFill>
+                <a:latin typeface="Arial"/>
+              </a:rPr>
+              <a:t>≈ 20 000 ₽</a:t>
+            </a:r>
+          </a:p>
+        </p:txBody>
+      </p:sp>
+      <p:sp>
+        <p:nvSpPr>
+          <p:cNvPr id="8" name="TextBox 7"/>
+          <p:cNvSpPr txBox="1"/>
+          <p:nvPr/>
+        </p:nvSpPr>
+        <p:spPr>
+          <a:xfrm>
+            <a:off x="822960" y="5385816"/>
+            <a:ext cx="2103120" cy="365760"/>
+          </a:xfrm>
+          <a:prstGeom prst="rect">
+            <a:avLst/>
+          </a:prstGeom>
+          <a:noFill/>
+        </p:spPr>
+        <p:txBody>
+          <a:bodyPr wrap="square" lIns="0" rIns="0" tIns="0" bIns="0">
+            <a:spAutoFit/>
+          </a:bodyPr>
+          <a:lstStyle/>
+          <a:p>
+            <a:pPr algn="ctr">
+              <a:lnSpc>
+                <a:spcPct val="115000"/>
+              </a:lnSpc>
+            </a:pPr>
+            <a:r>
+              <a:rPr sz="1300" b="1">
+                <a:solidFill>
+                  <a:srgbClr val="14181C"/>
+                </a:solidFill>
+                <a:latin typeface="Arial"/>
+              </a:rPr>
+              <a:t>Adobe Acrobat Pro</a:t>
+            </a:r>
+          </a:p>
+        </p:txBody>
+      </p:sp>
+      <p:sp>
+        <p:nvSpPr>
+          <p:cNvPr id="9" name="TextBox 8"/>
+          <p:cNvSpPr txBox="1"/>
+          <p:nvPr/>
+        </p:nvSpPr>
+        <p:spPr>
+          <a:xfrm>
+            <a:off x="822960" y="5733288"/>
+            <a:ext cx="2103120" cy="365760"/>
+          </a:xfrm>
+          <a:prstGeom prst="rect">
+            <a:avLst/>
+          </a:prstGeom>
+          <a:noFill/>
+        </p:spPr>
+        <p:txBody>
+          <a:bodyPr wrap="square" lIns="0" rIns="0" tIns="0" bIns="0">
+            <a:spAutoFit/>
+          </a:bodyPr>
+          <a:lstStyle/>
+          <a:p>
+            <a:pPr algn="ctr">
+              <a:lnSpc>
+                <a:spcPct val="125000"/>
+              </a:lnSpc>
+            </a:pPr>
+            <a:r>
+              <a:rPr sz="1050" b="0">
+                <a:solidFill>
+                  <a:srgbClr val="606662"/>
+                </a:solidFill>
+                <a:latin typeface="Arial"/>
+              </a:rPr>
+              <a:t>Подписка в валюте</a:t>
+            </a:r>
+          </a:p>
+        </p:txBody>
+      </p:sp>
+      <p:sp>
+        <p:nvSpPr>
+          <p:cNvPr id="10" name="Rectangle 9"/>
           <p:cNvSpPr/>
           <p:nvPr/>
         </p:nvSpPr>
         <p:spPr>
           <a:xfrm>
-            <a:off x="822960" y="3867912"/>
-            <a:ext cx="2423160" cy="25400"/>
+            <a:off x="3493008" y="3340989"/>
+            <a:ext cx="2103120" cy="1916811"/>
+          </a:xfrm>
+          <a:prstGeom prst="rect">
+            <a:avLst/>
+          </a:prstGeom>
+          <a:solidFill>
+            <a:srgbClr val="D3CFC6"/>
+          </a:solidFill>
+          <a:ln>
+            <a:noFill/>
+          </a:ln>
+          <a:effectLst/>
+        </p:spPr>
+        <p:style>
+          <a:lnRef idx="1">
+            <a:schemeClr val="accent1"/>
+          </a:lnRef>
+          <a:fillRef idx="3">
+            <a:schemeClr val="accent1"/>
+          </a:fillRef>
+          <a:effectRef idx="2">
+            <a:schemeClr val="accent1"/>
+          </a:effectRef>
+          <a:fontRef idx="minor">
+            <a:schemeClr val="lt1"/>
+          </a:fontRef>
+        </p:style>
+        <p:txBody>
+          <a:bodyPr rtlCol="0" anchor="ctr"/>
+          <a:lstStyle/>
+          <a:p>
+            <a:pPr algn="ctr"/>
+          </a:p>
+        </p:txBody>
+      </p:sp>
+      <p:sp>
+        <p:nvSpPr>
+          <p:cNvPr id="11" name="TextBox 10"/>
+          <p:cNvSpPr txBox="1"/>
+          <p:nvPr/>
+        </p:nvSpPr>
+        <p:spPr>
+          <a:xfrm>
+            <a:off x="3493008" y="2865501"/>
+            <a:ext cx="2103120" cy="411480"/>
+          </a:xfrm>
+          <a:prstGeom prst="rect">
+            <a:avLst/>
+          </a:prstGeom>
+          <a:noFill/>
+        </p:spPr>
+        <p:txBody>
+          <a:bodyPr wrap="square" lIns="0" rIns="0" tIns="0" bIns="0">
+            <a:spAutoFit/>
+          </a:bodyPr>
+          <a:lstStyle/>
+          <a:p>
+            <a:pPr algn="ctr">
+              <a:lnSpc>
+                <a:spcPct val="125000"/>
+              </a:lnSpc>
+            </a:pPr>
+            <a:r>
+              <a:rPr sz="1900" b="1">
+                <a:solidFill>
+                  <a:srgbClr val="606662"/>
+                </a:solidFill>
+                <a:latin typeface="Arial"/>
+              </a:rPr>
+              <a:t>≈ 19 500 ₽</a:t>
+            </a:r>
+          </a:p>
+        </p:txBody>
+      </p:sp>
+      <p:sp>
+        <p:nvSpPr>
+          <p:cNvPr id="12" name="TextBox 11"/>
+          <p:cNvSpPr txBox="1"/>
+          <p:nvPr/>
+        </p:nvSpPr>
+        <p:spPr>
+          <a:xfrm>
+            <a:off x="3493008" y="5385816"/>
+            <a:ext cx="2103120" cy="365760"/>
+          </a:xfrm>
+          <a:prstGeom prst="rect">
+            <a:avLst/>
+          </a:prstGeom>
+          <a:noFill/>
+        </p:spPr>
+        <p:txBody>
+          <a:bodyPr wrap="square" lIns="0" rIns="0" tIns="0" bIns="0">
+            <a:spAutoFit/>
+          </a:bodyPr>
+          <a:lstStyle/>
+          <a:p>
+            <a:pPr algn="ctr">
+              <a:lnSpc>
+                <a:spcPct val="115000"/>
+              </a:lnSpc>
+            </a:pPr>
+            <a:r>
+              <a:rPr sz="1300" b="1">
+                <a:solidFill>
+                  <a:srgbClr val="14181C"/>
+                </a:solidFill>
+                <a:latin typeface="Arial"/>
+              </a:rPr>
+              <a:t>Foxit PDF Editor Pro</a:t>
+            </a:r>
+          </a:p>
+        </p:txBody>
+      </p:sp>
+      <p:sp>
+        <p:nvSpPr>
+          <p:cNvPr id="13" name="TextBox 12"/>
+          <p:cNvSpPr txBox="1"/>
+          <p:nvPr/>
+        </p:nvSpPr>
+        <p:spPr>
+          <a:xfrm>
+            <a:off x="3493008" y="5733288"/>
+            <a:ext cx="2103120" cy="365760"/>
+          </a:xfrm>
+          <a:prstGeom prst="rect">
+            <a:avLst/>
+          </a:prstGeom>
+          <a:noFill/>
+        </p:spPr>
+        <p:txBody>
+          <a:bodyPr wrap="square" lIns="0" rIns="0" tIns="0" bIns="0">
+            <a:spAutoFit/>
+          </a:bodyPr>
+          <a:lstStyle/>
+          <a:p>
+            <a:pPr algn="ctr">
+              <a:lnSpc>
+                <a:spcPct val="125000"/>
+              </a:lnSpc>
+            </a:pPr>
+            <a:r>
+              <a:rPr sz="1050" b="0">
+                <a:solidFill>
+                  <a:srgbClr val="606662"/>
+                </a:solidFill>
+                <a:latin typeface="Arial"/>
+              </a:rPr>
+              <a:t>Лицензия через реселлера</a:t>
+            </a:r>
+          </a:p>
+        </p:txBody>
+      </p:sp>
+      <p:sp>
+        <p:nvSpPr>
+          <p:cNvPr id="14" name="Rectangle 13"/>
+          <p:cNvSpPr/>
+          <p:nvPr/>
+        </p:nvSpPr>
+        <p:spPr>
+          <a:xfrm>
+            <a:off x="6163056" y="4078224"/>
+            <a:ext cx="2103120" cy="1179576"/>
+          </a:xfrm>
+          <a:prstGeom prst="rect">
+            <a:avLst/>
+          </a:prstGeom>
+          <a:solidFill>
+            <a:srgbClr val="1C5FD9"/>
+          </a:solidFill>
+          <a:ln>
+            <a:noFill/>
+          </a:ln>
+          <a:effectLst/>
+        </p:spPr>
+        <p:style>
+          <a:lnRef idx="1">
+            <a:schemeClr val="accent1"/>
+          </a:lnRef>
+          <a:fillRef idx="3">
+            <a:schemeClr val="accent1"/>
+          </a:fillRef>
+          <a:effectRef idx="2">
+            <a:schemeClr val="accent1"/>
+          </a:effectRef>
+          <a:fontRef idx="minor">
+            <a:schemeClr val="lt1"/>
+          </a:fontRef>
+        </p:style>
+        <p:txBody>
+          <a:bodyPr rtlCol="0" anchor="ctr"/>
+          <a:lstStyle/>
+          <a:p>
+            <a:pPr algn="ctr"/>
+          </a:p>
+        </p:txBody>
+      </p:sp>
+      <p:sp>
+        <p:nvSpPr>
+          <p:cNvPr id="15" name="TextBox 14"/>
+          <p:cNvSpPr txBox="1"/>
+          <p:nvPr/>
+        </p:nvSpPr>
+        <p:spPr>
+          <a:xfrm>
+            <a:off x="6163056" y="3602736"/>
+            <a:ext cx="2103120" cy="411480"/>
+          </a:xfrm>
+          <a:prstGeom prst="rect">
+            <a:avLst/>
+          </a:prstGeom>
+          <a:noFill/>
+        </p:spPr>
+        <p:txBody>
+          <a:bodyPr wrap="square" lIns="0" rIns="0" tIns="0" bIns="0">
+            <a:spAutoFit/>
+          </a:bodyPr>
+          <a:lstStyle/>
+          <a:p>
+            <a:pPr algn="ctr">
+              <a:lnSpc>
+                <a:spcPct val="125000"/>
+              </a:lnSpc>
+            </a:pPr>
+            <a:r>
+              <a:rPr sz="1900" b="1">
+                <a:solidFill>
+                  <a:srgbClr val="1C5FD9"/>
+                </a:solidFill>
+                <a:latin typeface="Arial"/>
+              </a:rPr>
+              <a:t>12 000 ₽</a:t>
+            </a:r>
+          </a:p>
+        </p:txBody>
+      </p:sp>
+      <p:sp>
+        <p:nvSpPr>
+          <p:cNvPr id="16" name="TextBox 15"/>
+          <p:cNvSpPr txBox="1"/>
+          <p:nvPr/>
+        </p:nvSpPr>
+        <p:spPr>
+          <a:xfrm>
+            <a:off x="6163056" y="5385816"/>
+            <a:ext cx="2103120" cy="365760"/>
+          </a:xfrm>
+          <a:prstGeom prst="rect">
+            <a:avLst/>
+          </a:prstGeom>
+          <a:noFill/>
+        </p:spPr>
+        <p:txBody>
+          <a:bodyPr wrap="square" lIns="0" rIns="0" tIns="0" bIns="0">
+            <a:spAutoFit/>
+          </a:bodyPr>
+          <a:lstStyle/>
+          <a:p>
+            <a:pPr algn="ctr">
+              <a:lnSpc>
+                <a:spcPct val="115000"/>
+              </a:lnSpc>
+            </a:pPr>
+            <a:r>
+              <a:rPr sz="1300" b="1">
+                <a:solidFill>
+                  <a:srgbClr val="14181C"/>
+                </a:solidFill>
+                <a:latin typeface="Arial"/>
+              </a:rPr>
+              <a:t>ПВ-Система PDF</a:t>
+            </a:r>
+          </a:p>
+        </p:txBody>
+      </p:sp>
+      <p:sp>
+        <p:nvSpPr>
+          <p:cNvPr id="17" name="TextBox 16"/>
+          <p:cNvSpPr txBox="1"/>
+          <p:nvPr/>
+        </p:nvSpPr>
+        <p:spPr>
+          <a:xfrm>
+            <a:off x="6163056" y="5733288"/>
+            <a:ext cx="2103120" cy="365760"/>
+          </a:xfrm>
+          <a:prstGeom prst="rect">
+            <a:avLst/>
+          </a:prstGeom>
+          <a:noFill/>
+        </p:spPr>
+        <p:txBody>
+          <a:bodyPr wrap="square" lIns="0" rIns="0" tIns="0" bIns="0">
+            <a:spAutoFit/>
+          </a:bodyPr>
+          <a:lstStyle/>
+          <a:p>
+            <a:pPr algn="ctr">
+              <a:lnSpc>
+                <a:spcPct val="125000"/>
+              </a:lnSpc>
+            </a:pPr>
+            <a:r>
+              <a:rPr sz="1050" b="0">
+                <a:solidFill>
+                  <a:srgbClr val="606662"/>
+                </a:solidFill>
+                <a:latin typeface="Arial"/>
+              </a:rPr>
+              <a:t>Одно рабочее место</a:t>
+            </a:r>
+          </a:p>
+        </p:txBody>
+      </p:sp>
+      <p:sp>
+        <p:nvSpPr>
+          <p:cNvPr id="18" name="Rectangle 17"/>
+          <p:cNvSpPr/>
+          <p:nvPr/>
+        </p:nvSpPr>
+        <p:spPr>
+          <a:xfrm>
+            <a:off x="8833104" y="4589374"/>
+            <a:ext cx="2103120" cy="668426"/>
+          </a:xfrm>
+          <a:prstGeom prst="rect">
+            <a:avLst/>
+          </a:prstGeom>
+          <a:solidFill>
+            <a:srgbClr val="1C5FD9"/>
+          </a:solidFill>
+          <a:ln>
+            <a:noFill/>
+          </a:ln>
+          <a:effectLst/>
+        </p:spPr>
+        <p:style>
+          <a:lnRef idx="1">
+            <a:schemeClr val="accent1"/>
+          </a:lnRef>
+          <a:fillRef idx="3">
+            <a:schemeClr val="accent1"/>
+          </a:fillRef>
+          <a:effectRef idx="2">
+            <a:schemeClr val="accent1"/>
+          </a:effectRef>
+          <a:fontRef idx="minor">
+            <a:schemeClr val="lt1"/>
+          </a:fontRef>
+        </p:style>
+        <p:txBody>
+          <a:bodyPr rtlCol="0" anchor="ctr"/>
+          <a:lstStyle/>
+          <a:p>
+            <a:pPr algn="ctr"/>
+          </a:p>
+        </p:txBody>
+      </p:sp>
+      <p:sp>
+        <p:nvSpPr>
+          <p:cNvPr id="19" name="TextBox 18"/>
+          <p:cNvSpPr txBox="1"/>
+          <p:nvPr/>
+        </p:nvSpPr>
+        <p:spPr>
+          <a:xfrm>
+            <a:off x="8833104" y="4113886"/>
+            <a:ext cx="2103120" cy="411480"/>
+          </a:xfrm>
+          <a:prstGeom prst="rect">
+            <a:avLst/>
+          </a:prstGeom>
+          <a:noFill/>
+        </p:spPr>
+        <p:txBody>
+          <a:bodyPr wrap="square" lIns="0" rIns="0" tIns="0" bIns="0">
+            <a:spAutoFit/>
+          </a:bodyPr>
+          <a:lstStyle/>
+          <a:p>
+            <a:pPr algn="ctr">
+              <a:lnSpc>
+                <a:spcPct val="125000"/>
+              </a:lnSpc>
+            </a:pPr>
+            <a:r>
+              <a:rPr sz="1900" b="1">
+                <a:solidFill>
+                  <a:srgbClr val="1C5FD9"/>
+                </a:solidFill>
+                <a:latin typeface="Arial"/>
+              </a:rPr>
+              <a:t>6 800 ₽</a:t>
+            </a:r>
+          </a:p>
+        </p:txBody>
+      </p:sp>
+      <p:sp>
+        <p:nvSpPr>
+          <p:cNvPr id="20" name="TextBox 19"/>
+          <p:cNvSpPr txBox="1"/>
+          <p:nvPr/>
+        </p:nvSpPr>
+        <p:spPr>
+          <a:xfrm>
+            <a:off x="8833104" y="5385816"/>
+            <a:ext cx="2103120" cy="365760"/>
+          </a:xfrm>
+          <a:prstGeom prst="rect">
+            <a:avLst/>
+          </a:prstGeom>
+          <a:noFill/>
+        </p:spPr>
+        <p:txBody>
+          <a:bodyPr wrap="square" lIns="0" rIns="0" tIns="0" bIns="0">
+            <a:spAutoFit/>
+          </a:bodyPr>
+          <a:lstStyle/>
+          <a:p>
+            <a:pPr algn="ctr">
+              <a:lnSpc>
+                <a:spcPct val="115000"/>
+              </a:lnSpc>
+            </a:pPr>
+            <a:r>
+              <a:rPr sz="1300" b="1">
+                <a:solidFill>
+                  <a:srgbClr val="14181C"/>
+                </a:solidFill>
+                <a:latin typeface="Arial"/>
+              </a:rPr>
+              <a:t>ПВ-Система PDF</a:t>
+            </a:r>
+          </a:p>
+        </p:txBody>
+      </p:sp>
+      <p:sp>
+        <p:nvSpPr>
+          <p:cNvPr id="21" name="TextBox 20"/>
+          <p:cNvSpPr txBox="1"/>
+          <p:nvPr/>
+        </p:nvSpPr>
+        <p:spPr>
+          <a:xfrm>
+            <a:off x="8833104" y="5733288"/>
+            <a:ext cx="2103120" cy="365760"/>
+          </a:xfrm>
+          <a:prstGeom prst="rect">
+            <a:avLst/>
+          </a:prstGeom>
+          <a:noFill/>
+        </p:spPr>
+        <p:txBody>
+          <a:bodyPr wrap="square" lIns="0" rIns="0" tIns="0" bIns="0">
+            <a:spAutoFit/>
+          </a:bodyPr>
+          <a:lstStyle/>
+          <a:p>
+            <a:pPr algn="ctr">
+              <a:lnSpc>
+                <a:spcPct val="125000"/>
+              </a:lnSpc>
+            </a:pPr>
+            <a:r>
+              <a:rPr sz="1050" b="0">
+                <a:solidFill>
+                  <a:srgbClr val="606662"/>
+                </a:solidFill>
+                <a:latin typeface="Arial"/>
+              </a:rPr>
+              <a:t>При 50 рабочих местах</a:t>
+            </a:r>
+          </a:p>
+        </p:txBody>
+      </p:sp>
+      <p:sp>
+        <p:nvSpPr>
+          <p:cNvPr id="22" name="Rectangle 21"/>
+          <p:cNvSpPr/>
+          <p:nvPr/>
+        </p:nvSpPr>
+        <p:spPr>
+          <a:xfrm>
+            <a:off x="822960" y="5257800"/>
+            <a:ext cx="10113264" cy="19050"/>
           </a:xfrm>
           <a:prstGeom prst="rect">
             <a:avLst/>
@@ -11947,131 +13475,14 @@
       </p:sp>
       <p:sp>
         <p:nvSpPr>
-          <p:cNvPr id="8" name="TextBox 7"/>
-          <p:cNvSpPr txBox="1"/>
-          <p:nvPr/>
-        </p:nvSpPr>
-        <p:spPr>
-          <a:xfrm>
-            <a:off x="822960" y="4069080"/>
-            <a:ext cx="2423160" cy="457200"/>
-          </a:xfrm>
-          <a:prstGeom prst="rect">
-            <a:avLst/>
-          </a:prstGeom>
-          <a:noFill/>
-        </p:spPr>
-        <p:txBody>
-          <a:bodyPr wrap="square" lIns="0" rIns="0" tIns="0" bIns="0">
-            <a:spAutoFit/>
-          </a:bodyPr>
-          <a:lstStyle/>
-          <a:p>
-            <a:pPr algn="l">
-              <a:lnSpc>
-                <a:spcPct val="125000"/>
-              </a:lnSpc>
-            </a:pPr>
-            <a:r>
-              <a:rPr sz="1700" b="1" spc="160">
-                <a:solidFill>
-                  <a:srgbClr val="14181C"/>
-                </a:solidFill>
-                <a:latin typeface="Arial"/>
-              </a:rPr>
-              <a:t>ЗАЯВКА</a:t>
-            </a:r>
-          </a:p>
-        </p:txBody>
-      </p:sp>
-      <p:sp>
-        <p:nvSpPr>
-          <p:cNvPr id="9" name="TextBox 8"/>
-          <p:cNvSpPr txBox="1"/>
-          <p:nvPr/>
-        </p:nvSpPr>
-        <p:spPr>
-          <a:xfrm>
-            <a:off x="822960" y="4526280"/>
-            <a:ext cx="2377440" cy="1005840"/>
-          </a:xfrm>
-          <a:prstGeom prst="rect">
-            <a:avLst/>
-          </a:prstGeom>
-          <a:noFill/>
-        </p:spPr>
-        <p:txBody>
-          <a:bodyPr wrap="square" lIns="0" rIns="0" tIns="0" bIns="0">
-            <a:spAutoFit/>
-          </a:bodyPr>
-          <a:lstStyle/>
-          <a:p>
-            <a:pPr algn="l">
-              <a:lnSpc>
-                <a:spcPct val="130000"/>
-              </a:lnSpc>
-            </a:pPr>
-            <a:r>
-              <a:rPr sz="1250" b="0">
-                <a:solidFill>
-                  <a:srgbClr val="606662"/>
-                </a:solidFill>
-                <a:latin typeface="Arial"/>
-              </a:rPr>
-              <a:t>Обсуждаем количество мест и получаете демоверсию</a:t>
-            </a:r>
-          </a:p>
-        </p:txBody>
-      </p:sp>
-      <p:sp>
-        <p:nvSpPr>
-          <p:cNvPr id="10" name="TextBox 9"/>
-          <p:cNvSpPr txBox="1"/>
-          <p:nvPr/>
-        </p:nvSpPr>
-        <p:spPr>
-          <a:xfrm>
-            <a:off x="3630168" y="3154680"/>
-            <a:ext cx="2606040" cy="731520"/>
-          </a:xfrm>
-          <a:prstGeom prst="rect">
-            <a:avLst/>
-          </a:prstGeom>
-          <a:noFill/>
-        </p:spPr>
-        <p:txBody>
-          <a:bodyPr wrap="square" lIns="0" rIns="0" tIns="0" bIns="0">
-            <a:spAutoFit/>
-          </a:bodyPr>
-          <a:lstStyle/>
-          <a:p>
-            <a:pPr algn="l">
-              <a:lnSpc>
-                <a:spcPct val="125000"/>
-              </a:lnSpc>
-            </a:pPr>
-            <a:r>
-              <a:rPr sz="3400" b="1">
-                <a:solidFill>
-                  <a:srgbClr val="C9C5BC"/>
-                </a:solidFill>
-                <a:latin typeface="Arial"/>
-              </a:rPr>
-              <a:t>02</a:t>
-            </a:r>
-          </a:p>
-        </p:txBody>
-      </p:sp>
-      <p:sp>
-        <p:nvSpPr>
-          <p:cNvPr id="11" name="Rectangle 10"/>
+          <p:cNvPr id="23" name="Rectangle 22"/>
           <p:cNvSpPr/>
           <p:nvPr/>
         </p:nvSpPr>
         <p:spPr>
           <a:xfrm>
-            <a:off x="3630168" y="3867912"/>
-            <a:ext cx="2423160" cy="25400"/>
+            <a:off x="8138160" y="1051560"/>
+            <a:ext cx="3200400" cy="1691640"/>
           </a:xfrm>
           <a:prstGeom prst="rect">
             <a:avLst/>
@@ -12108,14 +13519,14 @@
       </p:sp>
       <p:sp>
         <p:nvSpPr>
-          <p:cNvPr id="12" name="TextBox 11"/>
-          <p:cNvSpPr txBox="1"/>
-          <p:nvPr/>
-        </p:nvSpPr>
-        <p:spPr>
-          <a:xfrm>
-            <a:off x="3630168" y="4069080"/>
-            <a:ext cx="2423160" cy="457200"/>
+          <p:cNvPr id="24" name="TextBox 23"/>
+          <p:cNvSpPr txBox="1"/>
+          <p:nvPr/>
+        </p:nvSpPr>
+        <p:spPr>
+          <a:xfrm>
+            <a:off x="8430768" y="1298448"/>
+            <a:ext cx="2651760" cy="457200"/>
           </a:xfrm>
           <a:prstGeom prst="rect">
             <a:avLst/>
@@ -12134,381 +13545,137 @@
               </a:lnSpc>
             </a:pPr>
             <a:r>
-              <a:rPr sz="1700" b="1" spc="160">
-                <a:solidFill>
-                  <a:srgbClr val="14181C"/>
-                </a:solidFill>
-                <a:latin typeface="Arial"/>
-              </a:rPr>
-              <a:t>ДОГОВОР</a:t>
-            </a:r>
-          </a:p>
-        </p:txBody>
-      </p:sp>
-      <p:sp>
-        <p:nvSpPr>
-          <p:cNvPr id="13" name="TextBox 12"/>
-          <p:cNvSpPr txBox="1"/>
-          <p:nvPr/>
-        </p:nvSpPr>
-        <p:spPr>
-          <a:xfrm>
-            <a:off x="3630168" y="4526280"/>
-            <a:ext cx="2377440" cy="1005840"/>
-          </a:xfrm>
-          <a:prstGeom prst="rect">
-            <a:avLst/>
-          </a:prstGeom>
-          <a:noFill/>
-        </p:spPr>
-        <p:txBody>
-          <a:bodyPr wrap="square" lIns="0" rIns="0" tIns="0" bIns="0">
-            <a:spAutoFit/>
-          </a:bodyPr>
-          <a:lstStyle/>
-          <a:p>
-            <a:pPr algn="l">
-              <a:lnSpc>
-                <a:spcPct val="130000"/>
-              </a:lnSpc>
-            </a:pPr>
-            <a:r>
-              <a:rPr sz="1250" b="0">
+              <a:rPr sz="1200" b="0" spc="160">
+                <a:solidFill>
+                  <a:srgbClr val="9AD4E8"/>
+                </a:solidFill>
+                <a:latin typeface="Arial"/>
+              </a:rPr>
+              <a:t>ВЫГОДА ДО</a:t>
+            </a:r>
+          </a:p>
+        </p:txBody>
+      </p:sp>
+      <p:sp>
+        <p:nvSpPr>
+          <p:cNvPr id="25" name="TextBox 24"/>
+          <p:cNvSpPr txBox="1"/>
+          <p:nvPr/>
+        </p:nvSpPr>
+        <p:spPr>
+          <a:xfrm>
+            <a:off x="8430768" y="1664208"/>
+            <a:ext cx="2651760" cy="731520"/>
+          </a:xfrm>
+          <a:prstGeom prst="rect">
+            <a:avLst/>
+          </a:prstGeom>
+          <a:noFill/>
+        </p:spPr>
+        <p:txBody>
+          <a:bodyPr wrap="square" lIns="0" rIns="0" tIns="0" bIns="0">
+            <a:spAutoFit/>
+          </a:bodyPr>
+          <a:lstStyle/>
+          <a:p>
+            <a:pPr algn="l">
+              <a:lnSpc>
+                <a:spcPct val="125000"/>
+              </a:lnSpc>
+            </a:pPr>
+            <a:r>
+              <a:rPr sz="4400" b="1">
+                <a:solidFill>
+                  <a:srgbClr val="F7F5EF"/>
+                </a:solidFill>
+                <a:latin typeface="Arial"/>
+              </a:rPr>
+              <a:t>×3</a:t>
+            </a:r>
+          </a:p>
+        </p:txBody>
+      </p:sp>
+      <p:sp>
+        <p:nvSpPr>
+          <p:cNvPr id="26" name="TextBox 25"/>
+          <p:cNvSpPr txBox="1"/>
+          <p:nvPr/>
+        </p:nvSpPr>
+        <p:spPr>
+          <a:xfrm>
+            <a:off x="8430768" y="2212848"/>
+            <a:ext cx="2651760" cy="457200"/>
+          </a:xfrm>
+          <a:prstGeom prst="rect">
+            <a:avLst/>
+          </a:prstGeom>
+          <a:noFill/>
+        </p:spPr>
+        <p:txBody>
+          <a:bodyPr wrap="square" lIns="0" rIns="0" tIns="0" bIns="0">
+            <a:spAutoFit/>
+          </a:bodyPr>
+          <a:lstStyle/>
+          <a:p>
+            <a:pPr algn="l">
+              <a:lnSpc>
+                <a:spcPct val="125000"/>
+              </a:lnSpc>
+            </a:pPr>
+            <a:r>
+              <a:rPr sz="1200" b="0">
+                <a:solidFill>
+                  <a:srgbClr val="B6B3AC"/>
+                </a:solidFill>
+                <a:latin typeface="Arial"/>
+              </a:rPr>
+              <a:t>дешевле при 50 местах</a:t>
+            </a:r>
+          </a:p>
+        </p:txBody>
+      </p:sp>
+      <p:sp>
+        <p:nvSpPr>
+          <p:cNvPr id="27" name="TextBox 26"/>
+          <p:cNvSpPr txBox="1"/>
+          <p:nvPr/>
+        </p:nvSpPr>
+        <p:spPr>
+          <a:xfrm>
+            <a:off x="822960" y="5961888"/>
+            <a:ext cx="10515600" cy="274320"/>
+          </a:xfrm>
+          <a:prstGeom prst="rect">
+            <a:avLst/>
+          </a:prstGeom>
+          <a:noFill/>
+        </p:spPr>
+        <p:txBody>
+          <a:bodyPr wrap="square" lIns="0" rIns="0" tIns="0" bIns="0">
+            <a:spAutoFit/>
+          </a:bodyPr>
+          <a:lstStyle/>
+          <a:p>
+            <a:pPr algn="l">
+              <a:lnSpc>
+                <a:spcPct val="120000"/>
+              </a:lnSpc>
+            </a:pPr>
+            <a:r>
+              <a:rPr sz="1000" b="0">
                 <a:solidFill>
                   <a:srgbClr val="606662"/>
                 </a:solidFill>
                 <a:latin typeface="Arial"/>
               </a:rPr>
-              <a:t>Подписываем и выставляем счёт</a:t>
-            </a:r>
-          </a:p>
-        </p:txBody>
-      </p:sp>
-      <p:sp>
-        <p:nvSpPr>
-          <p:cNvPr id="14" name="TextBox 13"/>
-          <p:cNvSpPr txBox="1"/>
-          <p:nvPr/>
-        </p:nvSpPr>
-        <p:spPr>
-          <a:xfrm>
-            <a:off x="6437376" y="3154680"/>
-            <a:ext cx="2606040" cy="731520"/>
-          </a:xfrm>
-          <a:prstGeom prst="rect">
-            <a:avLst/>
-          </a:prstGeom>
-          <a:noFill/>
-        </p:spPr>
-        <p:txBody>
-          <a:bodyPr wrap="square" lIns="0" rIns="0" tIns="0" bIns="0">
-            <a:spAutoFit/>
-          </a:bodyPr>
-          <a:lstStyle/>
-          <a:p>
-            <a:pPr algn="l">
-              <a:lnSpc>
-                <a:spcPct val="125000"/>
-              </a:lnSpc>
-            </a:pPr>
-            <a:r>
-              <a:rPr sz="3400" b="1">
-                <a:solidFill>
-                  <a:srgbClr val="C9C5BC"/>
-                </a:solidFill>
-                <a:latin typeface="Arial"/>
-              </a:rPr>
-              <a:t>03</a:t>
-            </a:r>
-          </a:p>
-        </p:txBody>
-      </p:sp>
-      <p:sp>
-        <p:nvSpPr>
-          <p:cNvPr id="15" name="Rectangle 14"/>
-          <p:cNvSpPr/>
-          <p:nvPr/>
-        </p:nvSpPr>
-        <p:spPr>
-          <a:xfrm>
-            <a:off x="6437376" y="3867912"/>
-            <a:ext cx="2423160" cy="25400"/>
-          </a:xfrm>
-          <a:prstGeom prst="rect">
-            <a:avLst/>
-          </a:prstGeom>
-          <a:solidFill>
-            <a:srgbClr val="14181C"/>
-          </a:solidFill>
-          <a:ln>
-            <a:noFill/>
-          </a:ln>
-          <a:effectLst/>
-        </p:spPr>
-        <p:style>
-          <a:lnRef idx="1">
-            <a:schemeClr val="accent1"/>
-          </a:lnRef>
-          <a:fillRef idx="3">
-            <a:schemeClr val="accent1"/>
-          </a:fillRef>
-          <a:effectRef idx="2">
-            <a:schemeClr val="accent1"/>
-          </a:effectRef>
-          <a:fontRef idx="minor">
-            <a:schemeClr val="lt1"/>
-          </a:fontRef>
-        </p:style>
-        <p:txBody>
-          <a:bodyPr rtlCol="0" anchor="ctr"/>
-          <a:lstStyle/>
-          <a:p>
-            <a:pPr algn="ctr"/>
-          </a:p>
-        </p:txBody>
-      </p:sp>
-      <p:sp>
-        <p:nvSpPr>
-          <p:cNvPr id="16" name="TextBox 15"/>
-          <p:cNvSpPr txBox="1"/>
-          <p:nvPr/>
-        </p:nvSpPr>
-        <p:spPr>
-          <a:xfrm>
-            <a:off x="6437376" y="4069080"/>
-            <a:ext cx="2423160" cy="457200"/>
-          </a:xfrm>
-          <a:prstGeom prst="rect">
-            <a:avLst/>
-          </a:prstGeom>
-          <a:noFill/>
-        </p:spPr>
-        <p:txBody>
-          <a:bodyPr wrap="square" lIns="0" rIns="0" tIns="0" bIns="0">
-            <a:spAutoFit/>
-          </a:bodyPr>
-          <a:lstStyle/>
-          <a:p>
-            <a:pPr algn="l">
-              <a:lnSpc>
-                <a:spcPct val="125000"/>
-              </a:lnSpc>
-            </a:pPr>
-            <a:r>
-              <a:rPr sz="1700" b="1" spc="160">
-                <a:solidFill>
-                  <a:srgbClr val="14181C"/>
-                </a:solidFill>
-                <a:latin typeface="Arial"/>
-              </a:rPr>
-              <a:t>ПЕРЕДАЧА</a:t>
-            </a:r>
-          </a:p>
-        </p:txBody>
-      </p:sp>
-      <p:sp>
-        <p:nvSpPr>
-          <p:cNvPr id="17" name="TextBox 16"/>
-          <p:cNvSpPr txBox="1"/>
-          <p:nvPr/>
-        </p:nvSpPr>
-        <p:spPr>
-          <a:xfrm>
-            <a:off x="6437376" y="4526280"/>
-            <a:ext cx="2377440" cy="1005840"/>
-          </a:xfrm>
-          <a:prstGeom prst="rect">
-            <a:avLst/>
-          </a:prstGeom>
-          <a:noFill/>
-        </p:spPr>
-        <p:txBody>
-          <a:bodyPr wrap="square" lIns="0" rIns="0" tIns="0" bIns="0">
-            <a:spAutoFit/>
-          </a:bodyPr>
-          <a:lstStyle/>
-          <a:p>
-            <a:pPr algn="l">
-              <a:lnSpc>
-                <a:spcPct val="130000"/>
-              </a:lnSpc>
-            </a:pPr>
-            <a:r>
-              <a:rPr sz="1250" b="0">
-                <a:solidFill>
-                  <a:srgbClr val="606662"/>
-                </a:solidFill>
-                <a:latin typeface="Arial"/>
-              </a:rPr>
-              <a:t>Ключ активации — 3 рабочих дня после оплаты</a:t>
-            </a:r>
-          </a:p>
-        </p:txBody>
-      </p:sp>
-      <p:sp>
-        <p:nvSpPr>
-          <p:cNvPr id="18" name="TextBox 17"/>
-          <p:cNvSpPr txBox="1"/>
-          <p:nvPr/>
-        </p:nvSpPr>
-        <p:spPr>
-          <a:xfrm>
-            <a:off x="9244584" y="3154680"/>
-            <a:ext cx="2606040" cy="731520"/>
-          </a:xfrm>
-          <a:prstGeom prst="rect">
-            <a:avLst/>
-          </a:prstGeom>
-          <a:noFill/>
-        </p:spPr>
-        <p:txBody>
-          <a:bodyPr wrap="square" lIns="0" rIns="0" tIns="0" bIns="0">
-            <a:spAutoFit/>
-          </a:bodyPr>
-          <a:lstStyle/>
-          <a:p>
-            <a:pPr algn="l">
-              <a:lnSpc>
-                <a:spcPct val="125000"/>
-              </a:lnSpc>
-            </a:pPr>
-            <a:r>
-              <a:rPr sz="3400" b="1">
-                <a:solidFill>
-                  <a:srgbClr val="C9C5BC"/>
-                </a:solidFill>
-                <a:latin typeface="Arial"/>
-              </a:rPr>
-              <a:t>04</a:t>
-            </a:r>
-          </a:p>
-        </p:txBody>
-      </p:sp>
-      <p:sp>
-        <p:nvSpPr>
-          <p:cNvPr id="19" name="Rectangle 18"/>
-          <p:cNvSpPr/>
-          <p:nvPr/>
-        </p:nvSpPr>
-        <p:spPr>
-          <a:xfrm>
-            <a:off x="9244584" y="3867912"/>
-            <a:ext cx="2423160" cy="25400"/>
-          </a:xfrm>
-          <a:prstGeom prst="rect">
-            <a:avLst/>
-          </a:prstGeom>
-          <a:solidFill>
-            <a:srgbClr val="14181C"/>
-          </a:solidFill>
-          <a:ln>
-            <a:noFill/>
-          </a:ln>
-          <a:effectLst/>
-        </p:spPr>
-        <p:style>
-          <a:lnRef idx="1">
-            <a:schemeClr val="accent1"/>
-          </a:lnRef>
-          <a:fillRef idx="3">
-            <a:schemeClr val="accent1"/>
-          </a:fillRef>
-          <a:effectRef idx="2">
-            <a:schemeClr val="accent1"/>
-          </a:effectRef>
-          <a:fontRef idx="minor">
-            <a:schemeClr val="lt1"/>
-          </a:fontRef>
-        </p:style>
-        <p:txBody>
-          <a:bodyPr rtlCol="0" anchor="ctr"/>
-          <a:lstStyle/>
-          <a:p>
-            <a:pPr algn="ctr"/>
-          </a:p>
-        </p:txBody>
-      </p:sp>
-      <p:sp>
-        <p:nvSpPr>
-          <p:cNvPr id="20" name="TextBox 19"/>
-          <p:cNvSpPr txBox="1"/>
-          <p:nvPr/>
-        </p:nvSpPr>
-        <p:spPr>
-          <a:xfrm>
-            <a:off x="9244584" y="4069080"/>
-            <a:ext cx="2423160" cy="457200"/>
-          </a:xfrm>
-          <a:prstGeom prst="rect">
-            <a:avLst/>
-          </a:prstGeom>
-          <a:noFill/>
-        </p:spPr>
-        <p:txBody>
-          <a:bodyPr wrap="square" lIns="0" rIns="0" tIns="0" bIns="0">
-            <a:spAutoFit/>
-          </a:bodyPr>
-          <a:lstStyle/>
-          <a:p>
-            <a:pPr algn="l">
-              <a:lnSpc>
-                <a:spcPct val="125000"/>
-              </a:lnSpc>
-            </a:pPr>
-            <a:r>
-              <a:rPr sz="1700" b="1" spc="160">
-                <a:solidFill>
-                  <a:srgbClr val="14181C"/>
-                </a:solidFill>
-                <a:latin typeface="Arial"/>
-              </a:rPr>
-              <a:t>ЗАПУСК</a:t>
-            </a:r>
-          </a:p>
-        </p:txBody>
-      </p:sp>
-      <p:sp>
-        <p:nvSpPr>
-          <p:cNvPr id="21" name="TextBox 20"/>
-          <p:cNvSpPr txBox="1"/>
-          <p:nvPr/>
-        </p:nvSpPr>
-        <p:spPr>
-          <a:xfrm>
-            <a:off x="9244584" y="4526280"/>
-            <a:ext cx="2377440" cy="1005840"/>
-          </a:xfrm>
-          <a:prstGeom prst="rect">
-            <a:avLst/>
-          </a:prstGeom>
-          <a:noFill/>
-        </p:spPr>
-        <p:txBody>
-          <a:bodyPr wrap="square" lIns="0" rIns="0" tIns="0" bIns="0">
-            <a:spAutoFit/>
-          </a:bodyPr>
-          <a:lstStyle/>
-          <a:p>
-            <a:pPr algn="l">
-              <a:lnSpc>
-                <a:spcPct val="130000"/>
-              </a:lnSpc>
-            </a:pPr>
-            <a:r>
-              <a:rPr sz="1250" b="0">
-                <a:solidFill>
-                  <a:srgbClr val="606662"/>
-                </a:solidFill>
-                <a:latin typeface="Arial"/>
-              </a:rPr>
-              <a:t>Установка, настройка и обучение сотрудников</a:t>
-            </a:r>
-          </a:p>
-        </p:txBody>
-      </p:sp>
-      <p:sp>
-        <p:nvSpPr>
-          <p:cNvPr id="22" name="TextBox 21"/>
+              <a:t>Цены зарубежных продуктов ориентировочные, по открытым данным. Подписки оплачиваются в валюте.</a:t>
+            </a:r>
+          </a:p>
+        </p:txBody>
+      </p:sp>
+      <p:sp>
+        <p:nvSpPr>
+          <p:cNvPr id="28" name="TextBox 27"/>
           <p:cNvSpPr txBox="1"/>
           <p:nvPr/>
         </p:nvSpPr>
@@ -12547,7 +13714,7 @@
       </p:sp>
       <p:sp>
         <p:nvSpPr>
-          <p:cNvPr id="23" name="TextBox 22"/>
+          <p:cNvPr id="29" name="TextBox 28"/>
           <p:cNvSpPr txBox="1"/>
           <p:nvPr/>
         </p:nvSpPr>
